--- a/neerlandais1/powerpoints/Module_29_Als_ik_tijd_had.pptx
+++ b/neerlandais1/powerpoints/Module_29_Als_ik_tijd_had.pptx
@@ -133,18 +133,18 @@
   <p:extLst>
     <p:ext uri="{521415D9-36F7-43E2-AB2F-B90AF26B5E84}">
       <p14:sectionLst xmlns:p14="http://schemas.microsoft.com/office/powerpoint/2010/main">
-        <p14:section name="Ouverture" id="{ccb75e59-0e99-6ff2-289b-2cde7e8a8647}">
+        <p14:section name="Ouverture" id="{0727b4d6-d71d-30db-ac7a-152ea5090df5}">
           <p14:sldIdLst>
             <p14:sldId id="256"/>
           </p14:sldIdLst>
         </p14:section>
-        <p14:section name="Découvrir" id="{48bc45eb-a79d-235e-053e-14b00cc49d80}">
+        <p14:section name="Découvrir" id="{57bc6ffa-9031-e294-724e-0fb963571667}">
           <p14:sldIdLst>
             <p14:sldId id="257"/>
             <p14:sldId id="258"/>
           </p14:sldIdLst>
         </p14:section>
-        <p14:section name="Comprendre" id="{a724c489-e1f9-ebd9-1772-cc148f3dde93}">
+        <p14:section name="Comprendre" id="{9fed51da-5edc-3278-7077-c1682b65aef1}">
           <p14:sldIdLst>
             <p14:sldId id="259"/>
             <p14:sldId id="260"/>
@@ -158,7 +158,7 @@
             <p14:sldId id="268"/>
           </p14:sldIdLst>
         </p14:section>
-        <p14:section name="JIJ NU ! — Oefeningen" id="{07c78bbf-e25a-0655-63d6-aacfdc738638}">
+        <p14:section name="JIJ NU ! — Oefeningen" id="{bea76033-6c30-ed07-5d07-1cd1d91f0240}">
           <p14:sldIdLst>
             <p14:sldId id="269"/>
             <p14:sldId id="270"/>
@@ -175,7 +175,7 @@
             <p14:sldId id="281"/>
           </p14:sldIdLst>
         </p14:section>
-        <p14:section name="Clôture" id="{d161bff9-448f-2fa3-a747-80ee99f3310e}">
+        <p14:section name="Clôture" id="{16c9947d-3530-8258-3fc0-ec9c7b88bb7d}">
           <p14:sldIdLst>
             <p14:sldId id="282"/>
           </p14:sldIdLst>
@@ -2192,7 +2192,7 @@
             <a:r>
               <a:rPr lang="en-US" dirty="0"/>
               <a:t>Objectif : Mise en situation finale : proposer, comparer et négocier poliment.
-Synthèse du parcours : conditionnel, montants (M26), préférences (M27), elkaar (M28 : We zouden elkaar vaker kunnen zien). Le budget total ne doit pas dépasser 5 000 € : faites additionner à voix haute.</a:t>
+Synthèse du bloc 6 : conditionnel, montants (M26), préférences (M27), elkaar (M28 : We zouden elkaar vaker kunnen zien). Le budget total ne doit pas dépasser 5 000 € : faites additionner à voix haute.</a:t>
             </a:r>
             <a:endParaRPr lang="en-US" dirty="0"/>
           </a:p>
@@ -2280,12 +2280,12 @@
           <a:p>
             <a:r>
               <a:rPr lang="en-US" dirty="0"/>
-              <a:t>Objectif : Vérifier les 3 objectifs et clore le parcours Néerlandais 1.
+              <a:t>Objectif : Vérifier les 3 objectifs et clore le bloc 6.
 Réponses :
 1. Zou je me kunnen helpen?
 2. Je zou meer moeten slapen. (ou une autre idée)
 3. Als ik tijd had, zou ik meegaan.
-Bilan : faites relire la frise des 29 modules et choisir un module à retravailler. En Néerlandais 2 : om … te, les autres conjonctions, hoeven te, le passif, le conditionnel passé.</a:t>
+Bilan : faites relire la frise des 29 modules et choisir un module à retravailler. Bloc 7 : le vocabulaire de l'entreprise (M30), les achterzetsels (M31) et la présentation personnelle et professionnelle (M32, bilan final du parcours).</a:t>
             </a:r>
             <a:endParaRPr lang="en-US" dirty="0"/>
           </a:p>
@@ -3806,7 +3806,7 @@
                   <a:srgbClr val="FFFFFF"/>
                 </a:solidFill>
               </a:rPr>
-              <a:t>MODULE 29 / 29</a:t>
+              <a:t>MODULE 29 / 32</a:t>
             </a:r>
             <a:endParaRPr lang="en-US" sz="1400" dirty="0"/>
           </a:p>
@@ -24608,7 +24608,7 @@
                   <a:schemeClr val="tx2"/>
                 </a:solidFill>
               </a:rPr>
-              <a:t>Ticket de sortie et bilan du parcours</a:t>
+              <a:t>Ticket de sortie et bilan du bloc 6</a:t>
             </a:r>
             <a:endParaRPr lang="en-US" sz="3000" dirty="0"/>
           </a:p>
@@ -25596,7 +25596,7 @@
                   <a:schemeClr val="bg1"/>
                 </a:solidFill>
               </a:rPr>
-              <a:t>Proficiat! Néerlandais 1 is klaar.</a:t>
+              <a:t>Proficiat! Bloc 6 is klaar.</a:t>
             </a:r>
             <a:r>
               <a:rPr lang="en-US" sz="1800" dirty="0">
@@ -25604,7 +25604,15 @@
                   <a:schemeClr val="bg1"/>
                 </a:solidFill>
               </a:rPr>
-              <a:t> — Volgende stap : Néerlandais 2</a:t>
+              <a:t> — Volgende stap : bloc 7, M30 </a:t>
+            </a:r>
+            <a:r>
+              <a:rPr lang="en-US" sz="1800" i="1" dirty="0">
+                <a:solidFill>
+                  <a:schemeClr val="bg1"/>
+                </a:solidFill>
+              </a:rPr>
+              <a:t>Het bedrijf</a:t>
             </a:r>
             <a:endParaRPr lang="en-US" sz="1800" dirty="0"/>
           </a:p>
@@ -25640,7 +25648,7 @@
                   <a:schemeClr val="accent5"/>
                 </a:solidFill>
               </a:rPr>
-              <a:t>NÉERLANDAIS 1 · 29 MODULES</a:t>
+              <a:t>BLOCS 1 À 6 · 29 MODULES</a:t>
             </a:r>
             <a:endParaRPr lang="en-US" sz="1200" dirty="0"/>
           </a:p>

--- a/neerlandais1/powerpoints/Module_29_Als_ik_tijd_had.pptx
+++ b/neerlandais1/powerpoints/Module_29_Als_ik_tijd_had.pptx
@@ -133,18 +133,18 @@
   <p:extLst>
     <p:ext uri="{521415D9-36F7-43E2-AB2F-B90AF26B5E84}">
       <p14:sectionLst xmlns:p14="http://schemas.microsoft.com/office/powerpoint/2010/main">
-        <p14:section name="Ouverture" id="{0727b4d6-d71d-30db-ac7a-152ea5090df5}">
+        <p14:section name="Ouverture" id="{f61549a5-c674-cfcc-dd4f-506fbb2503b8}">
           <p14:sldIdLst>
             <p14:sldId id="256"/>
           </p14:sldIdLst>
         </p14:section>
-        <p14:section name="Découvrir" id="{57bc6ffa-9031-e294-724e-0fb963571667}">
+        <p14:section name="Découvrir" id="{07ca0f05-d32d-2166-e8b9-cda153f93e35}">
           <p14:sldIdLst>
             <p14:sldId id="257"/>
             <p14:sldId id="258"/>
           </p14:sldIdLst>
         </p14:section>
-        <p14:section name="Comprendre" id="{9fed51da-5edc-3278-7077-c1682b65aef1}">
+        <p14:section name="Comprendre" id="{1ae7dd9e-354c-97d9-a7ad-7a6908acce19}">
           <p14:sldIdLst>
             <p14:sldId id="259"/>
             <p14:sldId id="260"/>
@@ -158,7 +158,7 @@
             <p14:sldId id="268"/>
           </p14:sldIdLst>
         </p14:section>
-        <p14:section name="JIJ NU ! — Oefeningen" id="{bea76033-6c30-ed07-5d07-1cd1d91f0240}">
+        <p14:section name="JIJ NU ! — Oefeningen" id="{035d1072-0fdf-f7c9-0f8a-a117301e9a3c}">
           <p14:sldIdLst>
             <p14:sldId id="269"/>
             <p14:sldId id="270"/>
@@ -175,7 +175,7 @@
             <p14:sldId id="281"/>
           </p14:sldIdLst>
         </p14:section>
-        <p14:section name="Clôture" id="{16c9947d-3530-8258-3fc0-ec9c7b88bb7d}">
+        <p14:section name="Clôture" id="{02d72bde-bb25-4afe-6ff9-1a2bdde26212}">
           <p14:sldIdLst>
             <p14:sldId id="282"/>
           </p14:sldIdLst>

--- a/neerlandais1/powerpoints/Module_29_Als_ik_tijd_had.pptx
+++ b/neerlandais1/powerpoints/Module_29_Als_ik_tijd_had.pptx
@@ -133,18 +133,18 @@
   <p:extLst>
     <p:ext uri="{521415D9-36F7-43E2-AB2F-B90AF26B5E84}">
       <p14:sectionLst xmlns:p14="http://schemas.microsoft.com/office/powerpoint/2010/main">
-        <p14:section name="Ouverture" id="{f61549a5-c674-cfcc-dd4f-506fbb2503b8}">
+        <p14:section name="Ouverture" id="{3d7cc61b-45ea-1b1c-6ba9-c626576ec573}">
           <p14:sldIdLst>
             <p14:sldId id="256"/>
           </p14:sldIdLst>
         </p14:section>
-        <p14:section name="Découvrir" id="{07ca0f05-d32d-2166-e8b9-cda153f93e35}">
+        <p14:section name="Découvrir" id="{fc51cc19-36d7-7538-70e0-72b90299e0a0}">
           <p14:sldIdLst>
             <p14:sldId id="257"/>
             <p14:sldId id="258"/>
           </p14:sldIdLst>
         </p14:section>
-        <p14:section name="Comprendre" id="{1ae7dd9e-354c-97d9-a7ad-7a6908acce19}">
+        <p14:section name="Comprendre" id="{ae159897-4fdc-9d0b-2e7d-37a75e332f88}">
           <p14:sldIdLst>
             <p14:sldId id="259"/>
             <p14:sldId id="260"/>
@@ -158,7 +158,7 @@
             <p14:sldId id="268"/>
           </p14:sldIdLst>
         </p14:section>
-        <p14:section name="JIJ NU ! — Oefeningen" id="{035d1072-0fdf-f7c9-0f8a-a117301e9a3c}">
+        <p14:section name="JIJ NU ! — Oefeningen" id="{f48250e4-090d-ecec-5d2e-bf783dacf745}">
           <p14:sldIdLst>
             <p14:sldId id="269"/>
             <p14:sldId id="270"/>
@@ -175,7 +175,7 @@
             <p14:sldId id="281"/>
           </p14:sldIdLst>
         </p14:section>
-        <p14:section name="Clôture" id="{02d72bde-bb25-4afe-6ff9-1a2bdde26212}">
+        <p14:section name="Clôture" id="{b445f7df-6bb2-697d-c726-b073b252d613}">
           <p14:sldIdLst>
             <p14:sldId id="282"/>
           </p14:sldIdLst>

--- a/neerlandais1/powerpoints/Module_29_Als_ik_tijd_had.pptx
+++ b/neerlandais1/powerpoints/Module_29_Als_ik_tijd_had.pptx
@@ -133,18 +133,18 @@
   <p:extLst>
     <p:ext uri="{521415D9-36F7-43E2-AB2F-B90AF26B5E84}">
       <p14:sectionLst xmlns:p14="http://schemas.microsoft.com/office/powerpoint/2010/main">
-        <p14:section name="Ouverture" id="{3d7cc61b-45ea-1b1c-6ba9-c626576ec573}">
+        <p14:section name="Ouverture" id="{e067a0f4-d6f2-2f00-2451-456ac31bf19a}">
           <p14:sldIdLst>
             <p14:sldId id="256"/>
           </p14:sldIdLst>
         </p14:section>
-        <p14:section name="Découvrir" id="{fc51cc19-36d7-7538-70e0-72b90299e0a0}">
+        <p14:section name="Découvrir" id="{68fa88af-134d-f851-b52e-c849ee8caa9b}">
           <p14:sldIdLst>
             <p14:sldId id="257"/>
             <p14:sldId id="258"/>
           </p14:sldIdLst>
         </p14:section>
-        <p14:section name="Comprendre" id="{ae159897-4fdc-9d0b-2e7d-37a75e332f88}">
+        <p14:section name="Comprendre" id="{8caf164b-a2e2-052c-699a-675920f24d8d}">
           <p14:sldIdLst>
             <p14:sldId id="259"/>
             <p14:sldId id="260"/>
@@ -158,7 +158,7 @@
             <p14:sldId id="268"/>
           </p14:sldIdLst>
         </p14:section>
-        <p14:section name="JIJ NU ! — Oefeningen" id="{f48250e4-090d-ecec-5d2e-bf783dacf745}">
+        <p14:section name="JIJ NU ! — Oefeningen" id="{e8b241b6-37a3-3a8e-819c-70c0bf212142}">
           <p14:sldIdLst>
             <p14:sldId id="269"/>
             <p14:sldId id="270"/>
@@ -175,7 +175,7 @@
             <p14:sldId id="281"/>
           </p14:sldIdLst>
         </p14:section>
-        <p14:section name="Clôture" id="{b445f7df-6bb2-697d-c726-b073b252d613}">
+        <p14:section name="Clôture" id="{be20f688-20f0-d8a9-2cff-6fd001da2014}">
           <p14:sldIdLst>
             <p14:sldId id="282"/>
           </p14:sldIdLst>

--- a/neerlandais1/powerpoints/Module_29_Als_ik_tijd_had.pptx
+++ b/neerlandais1/powerpoints/Module_29_Als_ik_tijd_had.pptx
@@ -133,18 +133,18 @@
   <p:extLst>
     <p:ext uri="{521415D9-36F7-43E2-AB2F-B90AF26B5E84}">
       <p14:sectionLst xmlns:p14="http://schemas.microsoft.com/office/powerpoint/2010/main">
-        <p14:section name="Ouverture" id="{e067a0f4-d6f2-2f00-2451-456ac31bf19a}">
+        <p14:section name="Ouverture" id="{10480824-5e33-d58f-0725-4417e3397ba2}">
           <p14:sldIdLst>
             <p14:sldId id="256"/>
           </p14:sldIdLst>
         </p14:section>
-        <p14:section name="Découvrir" id="{68fa88af-134d-f851-b52e-c849ee8caa9b}">
+        <p14:section name="Découvrir" id="{a562b5bc-febc-dc75-d845-95a87a4a8072}">
           <p14:sldIdLst>
             <p14:sldId id="257"/>
             <p14:sldId id="258"/>
           </p14:sldIdLst>
         </p14:section>
-        <p14:section name="Comprendre" id="{8caf164b-a2e2-052c-699a-675920f24d8d}">
+        <p14:section name="Comprendre" id="{d3ed54fc-8189-3426-23ec-0226044ceaa3}">
           <p14:sldIdLst>
             <p14:sldId id="259"/>
             <p14:sldId id="260"/>
@@ -158,7 +158,7 @@
             <p14:sldId id="268"/>
           </p14:sldIdLst>
         </p14:section>
-        <p14:section name="JIJ NU ! — Oefeningen" id="{e8b241b6-37a3-3a8e-819c-70c0bf212142}">
+        <p14:section name="JIJ NU ! — Oefeningen" id="{6d215e2e-e5b6-acf0-38bc-8f1be71e84ad}">
           <p14:sldIdLst>
             <p14:sldId id="269"/>
             <p14:sldId id="270"/>
@@ -175,7 +175,7 @@
             <p14:sldId id="281"/>
           </p14:sldIdLst>
         </p14:section>
-        <p14:section name="Clôture" id="{be20f688-20f0-d8a9-2cff-6fd001da2014}">
+        <p14:section name="Clôture" id="{c212e6d7-6a73-af00-4cab-25e4406ac50e}">
           <p14:sldIdLst>
             <p14:sldId id="282"/>
           </p14:sldIdLst>

--- a/neerlandais1/powerpoints/Module_29_Als_ik_tijd_had.pptx
+++ b/neerlandais1/powerpoints/Module_29_Als_ik_tijd_had.pptx
@@ -133,18 +133,18 @@
   <p:extLst>
     <p:ext uri="{521415D9-36F7-43E2-AB2F-B90AF26B5E84}">
       <p14:sectionLst xmlns:p14="http://schemas.microsoft.com/office/powerpoint/2010/main">
-        <p14:section name="Ouverture" id="{10480824-5e33-d58f-0725-4417e3397ba2}">
+        <p14:section name="Ouverture" id="{fb7d153c-5cd6-af71-6505-55cfe987486e}">
           <p14:sldIdLst>
             <p14:sldId id="256"/>
           </p14:sldIdLst>
         </p14:section>
-        <p14:section name="Découvrir" id="{a562b5bc-febc-dc75-d845-95a87a4a8072}">
+        <p14:section name="Découvrir" id="{73e5336e-e7fc-5aaa-26bc-ab81db008a86}">
           <p14:sldIdLst>
             <p14:sldId id="257"/>
             <p14:sldId id="258"/>
           </p14:sldIdLst>
         </p14:section>
-        <p14:section name="Comprendre" id="{d3ed54fc-8189-3426-23ec-0226044ceaa3}">
+        <p14:section name="Comprendre" id="{6a3486b4-a87d-41ce-8af9-ce345d096fa7}">
           <p14:sldIdLst>
             <p14:sldId id="259"/>
             <p14:sldId id="260"/>
@@ -158,7 +158,7 @@
             <p14:sldId id="268"/>
           </p14:sldIdLst>
         </p14:section>
-        <p14:section name="JIJ NU ! — Oefeningen" id="{6d215e2e-e5b6-acf0-38bc-8f1be71e84ad}">
+        <p14:section name="JIJ NU ! — Oefeningen" id="{907f89b8-ba19-836d-f8d5-fde89a8629d5}">
           <p14:sldIdLst>
             <p14:sldId id="269"/>
             <p14:sldId id="270"/>
@@ -175,7 +175,7 @@
             <p14:sldId id="281"/>
           </p14:sldIdLst>
         </p14:section>
-        <p14:section name="Clôture" id="{c212e6d7-6a73-af00-4cab-25e4406ac50e}">
+        <p14:section name="Clôture" id="{a308b630-06d0-c760-34a2-ed276f4f5946}">
           <p14:sldIdLst>
             <p14:sldId id="282"/>
           </p14:sldIdLst>

--- a/neerlandais1/powerpoints/Module_29_Als_ik_tijd_had.pptx
+++ b/neerlandais1/powerpoints/Module_29_Als_ik_tijd_had.pptx
@@ -133,18 +133,18 @@
   <p:extLst>
     <p:ext uri="{521415D9-36F7-43E2-AB2F-B90AF26B5E84}">
       <p14:sectionLst xmlns:p14="http://schemas.microsoft.com/office/powerpoint/2010/main">
-        <p14:section name="Ouverture" id="{fb7d153c-5cd6-af71-6505-55cfe987486e}">
+        <p14:section name="Ouverture" id="{8e3b7027-12de-847d-1698-51ef477c89d0}">
           <p14:sldIdLst>
             <p14:sldId id="256"/>
           </p14:sldIdLst>
         </p14:section>
-        <p14:section name="Découvrir" id="{73e5336e-e7fc-5aaa-26bc-ab81db008a86}">
+        <p14:section name="Découvrir" id="{bf27ba95-bd16-6b9f-0f74-6c3cc56b99fc}">
           <p14:sldIdLst>
             <p14:sldId id="257"/>
             <p14:sldId id="258"/>
           </p14:sldIdLst>
         </p14:section>
-        <p14:section name="Comprendre" id="{6a3486b4-a87d-41ce-8af9-ce345d096fa7}">
+        <p14:section name="Comprendre" id="{4f3faa7a-73cd-7311-e6c4-50d1efeb5f15}">
           <p14:sldIdLst>
             <p14:sldId id="259"/>
             <p14:sldId id="260"/>
@@ -158,7 +158,7 @@
             <p14:sldId id="268"/>
           </p14:sldIdLst>
         </p14:section>
-        <p14:section name="JIJ NU ! — Oefeningen" id="{907f89b8-ba19-836d-f8d5-fde89a8629d5}">
+        <p14:section name="JIJ NU ! — Oefeningen" id="{f00724ef-496e-bbed-0548-2932ab3725cc}">
           <p14:sldIdLst>
             <p14:sldId id="269"/>
             <p14:sldId id="270"/>
@@ -175,7 +175,7 @@
             <p14:sldId id="281"/>
           </p14:sldIdLst>
         </p14:section>
-        <p14:section name="Clôture" id="{a308b630-06d0-c760-34a2-ed276f4f5946}">
+        <p14:section name="Clôture" id="{0d20c436-88bb-3a65-90b5-5b91f6619b59}">
           <p14:sldIdLst>
             <p14:sldId id="282"/>
           </p14:sldIdLst>

--- a/neerlandais1/powerpoints/Module_29_Als_ik_tijd_had.pptx
+++ b/neerlandais1/powerpoints/Module_29_Als_ik_tijd_had.pptx
@@ -133,18 +133,18 @@
   <p:extLst>
     <p:ext uri="{521415D9-36F7-43E2-AB2F-B90AF26B5E84}">
       <p14:sectionLst xmlns:p14="http://schemas.microsoft.com/office/powerpoint/2010/main">
-        <p14:section name="Ouverture" id="{8e3b7027-12de-847d-1698-51ef477c89d0}">
+        <p14:section name="Ouverture" id="{7e3fd98b-1621-c22a-90b7-002d63d8c3bd}">
           <p14:sldIdLst>
             <p14:sldId id="256"/>
           </p14:sldIdLst>
         </p14:section>
-        <p14:section name="Découvrir" id="{bf27ba95-bd16-6b9f-0f74-6c3cc56b99fc}">
+        <p14:section name="Découvrir" id="{57e9061c-b5ac-70f7-fbab-f637e338ff45}">
           <p14:sldIdLst>
             <p14:sldId id="257"/>
             <p14:sldId id="258"/>
           </p14:sldIdLst>
         </p14:section>
-        <p14:section name="Comprendre" id="{4f3faa7a-73cd-7311-e6c4-50d1efeb5f15}">
+        <p14:section name="Comprendre" id="{3873c1f7-b152-9b05-db9c-11028a4644ec}">
           <p14:sldIdLst>
             <p14:sldId id="259"/>
             <p14:sldId id="260"/>
@@ -158,7 +158,7 @@
             <p14:sldId id="268"/>
           </p14:sldIdLst>
         </p14:section>
-        <p14:section name="JIJ NU ! — Oefeningen" id="{f00724ef-496e-bbed-0548-2932ab3725cc}">
+        <p14:section name="JIJ NU ! — Oefeningen" id="{8635f27a-5f38-2889-8570-580c3b5eec20}">
           <p14:sldIdLst>
             <p14:sldId id="269"/>
             <p14:sldId id="270"/>
@@ -175,7 +175,7 @@
             <p14:sldId id="281"/>
           </p14:sldIdLst>
         </p14:section>
-        <p14:section name="Clôture" id="{0d20c436-88bb-3a65-90b5-5b91f6619b59}">
+        <p14:section name="Clôture" id="{2fed27ec-e211-d431-3beb-860ae198e15e}">
           <p14:sldIdLst>
             <p14:sldId id="282"/>
           </p14:sldIdLst>

--- a/neerlandais1/powerpoints/Module_29_Als_ik_tijd_had.pptx
+++ b/neerlandais1/powerpoints/Module_29_Als_ik_tijd_had.pptx
@@ -133,18 +133,18 @@
   <p:extLst>
     <p:ext uri="{521415D9-36F7-43E2-AB2F-B90AF26B5E84}">
       <p14:sectionLst xmlns:p14="http://schemas.microsoft.com/office/powerpoint/2010/main">
-        <p14:section name="Ouverture" id="{7e3fd98b-1621-c22a-90b7-002d63d8c3bd}">
+        <p14:section name="Ouverture" id="{d0831b51-7a25-6a93-a9b5-68222d20fe1b}">
           <p14:sldIdLst>
             <p14:sldId id="256"/>
           </p14:sldIdLst>
         </p14:section>
-        <p14:section name="Découvrir" id="{57e9061c-b5ac-70f7-fbab-f637e338ff45}">
+        <p14:section name="Découvrir" id="{cf74c011-dd5b-4e44-4f0c-ff95658c2ae2}">
           <p14:sldIdLst>
             <p14:sldId id="257"/>
             <p14:sldId id="258"/>
           </p14:sldIdLst>
         </p14:section>
-        <p14:section name="Comprendre" id="{3873c1f7-b152-9b05-db9c-11028a4644ec}">
+        <p14:section name="Comprendre" id="{c59015b4-ce9a-5533-754e-f9abeb8d4c52}">
           <p14:sldIdLst>
             <p14:sldId id="259"/>
             <p14:sldId id="260"/>
@@ -158,7 +158,7 @@
             <p14:sldId id="268"/>
           </p14:sldIdLst>
         </p14:section>
-        <p14:section name="JIJ NU ! — Oefeningen" id="{8635f27a-5f38-2889-8570-580c3b5eec20}">
+        <p14:section name="JIJ NU ! — Oefeningen" id="{57cab07d-d66d-a204-98b8-a13cf378f380}">
           <p14:sldIdLst>
             <p14:sldId id="269"/>
             <p14:sldId id="270"/>
@@ -175,7 +175,7 @@
             <p14:sldId id="281"/>
           </p14:sldIdLst>
         </p14:section>
-        <p14:section name="Clôture" id="{2fed27ec-e211-d431-3beb-860ae198e15e}">
+        <p14:section name="Clôture" id="{844a58c9-cdd1-45f0-94fa-4ce8922600cf}">
           <p14:sldIdLst>
             <p14:sldId id="282"/>
           </p14:sldIdLst>
